--- a/slides/DDD-Workshop-Slides.pptx
+++ b/slides/DDD-Workshop-Slides.pptx
@@ -19377,7 +19377,7 @@
               </a:defRPr>
             </a:pPr>
             <a:r>
-              <a:t>github.com/lambda-house/teob-ts-workshop-gift-card</a:t>
+              <a:t>github.com/teob-cc/teob-ts-workshop-gift-card</a:t>
             </a:r>
           </a:p>
         </p:txBody>
